--- a/lectures/Lecture 7.2 - Cloud Deployment.pptx
+++ b/lectures/Lecture 7.2 - Cloud Deployment.pptx
@@ -1025,7 +1025,7 @@
             </a:pPr>
             <a:r>
               <a:rPr lang="en-US" dirty="0"/>
-              <a:t>Now the conceptual half. Design decisions first, mechanics at the end, not the other way around.</a:t>
+              <a:t>Now the conceptual half. Design decisions up front and the mechanics at the end, which is deliberately the reverse of how most deployment tutorials do it.</a:t>
             </a:r>
             <a:endParaRPr dirty="0"/>
           </a:p>
@@ -2365,7 +2365,7 @@
             </a:r>
             <a:r>
               <a:rPr lang="en-US" dirty="0"/>
-              <a:t>) so it restarts on crash, set up logging so you can debug, patch the OS for security, back up the database, monitor for downtime. The list goes on. The point: when you've got the whiteboard full, reveal that this is exactly what a PaaS does for you by default. Tee up the next slide.</a:t>
+              <a:t>) so it restarts on crash, set up logging so you can debug, patch the OS for security, back up the database, monitor for downtime. The list goes on. Once the whiteboard is full, that's the moment to reveal that this entire list is what a PaaS does for you by default. Tee up the next slide.</a:t>
             </a:r>
             <a:endParaRPr dirty="0"/>
           </a:p>
@@ -2539,7 +2539,7 @@
             </a:r>
             <a:r>
               <a:rPr lang="en-US" dirty="0"/>
-              <a:t> into a Linux box to do it properly. The opposite is really true. It IS real deployment, and it's what most small teams and startups actually use in production. Dispel the notion out loud.</a:t>
+              <a:t> into a Linux box to do it properly. It really is real deployment, and it's what most small teams and startups are actually running in production. Dispel that out loud.</a:t>
             </a:r>
             <a:endParaRPr dirty="0"/>
           </a:p>
@@ -4769,7 +4769,7 @@
             </a:pPr>
             <a:r>
               <a:rPr lang="en-US" dirty="0"/>
-              <a:t>This is the most important slide in the lecture. Skip it and nothing else in the deployment half makes sense - and CORS really lives or dies right here.</a:t>
+              <a:t>Probably the most important slide in the lecture. Skip it and nothing else in the deployment half makes sense, and CORS really lives or dies right here.</a:t>
             </a:r>
             <a:endParaRPr dirty="0"/>
           </a:p>
@@ -5092,15 +5092,15 @@
             </a:pPr>
             <a:r>
               <a:rPr lang="en-US" dirty="0"/>
-              <a:t>Define your API routes first so they match before the static mount, then mount the built frontend at /. The html=True flag makes it return </a:t>
+              <a:t>Routes first, static mount second, or the mount swallows your API paths. And html=True is the bit that makes it hand back index.html for any path that isn't a real file on disk, which is what client-side routing needs to work at all.</a:t>
             </a:r>
             <a:r>
               <a:rPr lang="en-US" dirty="0" err="1"/>
-              <a:t>index.html</a:t>
+              <a:t/>
             </a:r>
             <a:r>
               <a:rPr lang="en-US" dirty="0"/>
-              <a:t> for paths that don't match an actual file on disk, which is what you need for client-side routing to work.</a:t>
+              <a:t/>
             </a:r>
             <a:endParaRPr dirty="0"/>
           </a:p>
@@ -5258,15 +5258,15 @@
             </a:pPr>
             <a:r>
               <a:rPr lang="en-US" dirty="0"/>
-              <a:t>Define your API routes first so they match before the static mount, then mount the built frontend at /. The html=True flag makes it return </a:t>
+              <a:t>Routes first, static mount second, or the mount swallows your API paths. And html=True is the bit that makes it hand back index.html for any path that isn't a real file on disk, which is what client-side routing needs to work at all.</a:t>
             </a:r>
             <a:r>
               <a:rPr lang="en-US" dirty="0" err="1"/>
-              <a:t>index.html</a:t>
+              <a:t/>
             </a:r>
             <a:r>
               <a:rPr lang="en-US" dirty="0"/>
-              <a:t> for paths that don't match an actual file on disk, which is what you need for client-side routing to work.</a:t>
+              <a:t/>
             </a:r>
             <a:endParaRPr dirty="0"/>
           </a:p>
@@ -5764,23 +5764,23 @@
             </a:pPr>
             <a:r>
               <a:rPr lang="en-US" dirty="0"/>
-              <a:t>Walk through every piece. .env is local-only. python-</a:t>
+              <a:t>Walk every piece. .env stays local, and python-dotenv loads it at startup if it's sitting there and quietly does nothing if it isn't...which is really the nice property here, because the same code then works in dev and in prod without a branch anywhere. On Railway the vars get injected directly so there's no .env on the server at all, and .gitignore is what keeps the file from ever hitting the repo.</a:t>
             </a:r>
             <a:r>
               <a:rPr lang="en-US" dirty="0" err="1"/>
-              <a:t>dotenv</a:t>
+              <a:t/>
             </a:r>
             <a:r>
               <a:rPr lang="en-US" dirty="0"/>
-              <a:t> loads it at startup if the file is present, otherwise does nothing...which is really the nice property that makes the same code work in dev and in prod. In production, Railway injects the vars directly, so .env isn't needed on the server. .</a:t>
+              <a:t/>
             </a:r>
             <a:r>
               <a:rPr lang="en-US" dirty="0" err="1"/>
-              <a:t>gitignore</a:t>
+              <a:t/>
             </a:r>
             <a:r>
               <a:rPr lang="en-US" dirty="0"/>
-              <a:t> keeps the secret file out of the repo.</a:t>
+              <a:t/>
             </a:r>
             <a:endParaRPr dirty="0"/>
           </a:p>
@@ -5938,23 +5938,23 @@
             </a:pPr>
             <a:r>
               <a:rPr lang="en-US" dirty="0"/>
-              <a:t>Walk through every piece. .env is local-only. python-</a:t>
+              <a:t>Walk every piece. .env stays local, and python-dotenv loads it at startup if it's sitting there and quietly does nothing if it isn't...which is really the nice property here, because the same code then works in dev and in prod without a branch anywhere. On Railway the vars get injected directly so there's no .env on the server at all, and .gitignore is what keeps the file from ever hitting the repo.</a:t>
             </a:r>
             <a:r>
               <a:rPr lang="en-US" dirty="0" err="1"/>
-              <a:t>dotenv</a:t>
+              <a:t/>
             </a:r>
             <a:r>
               <a:rPr lang="en-US" dirty="0"/>
-              <a:t> loads it at startup if the file is present, otherwise does nothing...which is really the nice property that makes the same code work in dev and in prod. In production, Railway injects the vars directly, so .env isn't needed on the server. .</a:t>
+              <a:t/>
             </a:r>
             <a:r>
               <a:rPr lang="en-US" dirty="0" err="1"/>
-              <a:t>gitignore</a:t>
+              <a:t/>
             </a:r>
             <a:r>
               <a:rPr lang="en-US" dirty="0"/>
-              <a:t> keeps the secret file out of the repo.</a:t>
+              <a:t/>
             </a:r>
             <a:endParaRPr dirty="0"/>
           </a:p>
@@ -6112,23 +6112,23 @@
             </a:pPr>
             <a:r>
               <a:rPr lang="en-US" dirty="0"/>
-              <a:t>Walk through every piece. .env is local-only. python-</a:t>
+              <a:t>Walk every piece. .env stays local, and python-dotenv loads it at startup if it's sitting there and quietly does nothing if it isn't...which is really the nice property here, because the same code then works in dev and in prod without a branch anywhere. On Railway the vars get injected directly so there's no .env on the server at all, and .gitignore is what keeps the file from ever hitting the repo.</a:t>
             </a:r>
             <a:r>
               <a:rPr lang="en-US" dirty="0" err="1"/>
-              <a:t>dotenv</a:t>
+              <a:t/>
             </a:r>
             <a:r>
               <a:rPr lang="en-US" dirty="0"/>
-              <a:t> loads it at startup if the file is present, otherwise does nothing...which is really the nice property that makes the same code work in dev and in prod. In production, Railway injects the vars directly, so .env isn't needed on the server. .</a:t>
+              <a:t/>
             </a:r>
             <a:r>
               <a:rPr lang="en-US" dirty="0" err="1"/>
-              <a:t>gitignore</a:t>
+              <a:t/>
             </a:r>
             <a:r>
               <a:rPr lang="en-US" dirty="0"/>
-              <a:t> keeps the secret file out of the repo.</a:t>
+              <a:t/>
             </a:r>
             <a:endParaRPr dirty="0"/>
           </a:p>
@@ -7638,7 +7638,7 @@
             </a:pPr>
             <a:r>
               <a:rPr lang="en-US" dirty="0"/>
-              <a:t>The single biggest framing shift from past final projects: with agents, the CRUD-app-on-cloud part has gotten really cheap. So bronze got raised to include tests, CI, and one piece of code that requires actual design thinking. The point isn't to punish students with extra work, it's to push the project past 'thing the agent generated' into 'thing the team designed'. The PDF has the calibration anchor (</a:t>
+              <a:t>The single biggest framing shift from past final projects: with agents, the CRUD-app-on-cloud part has gotten really cheap. So bronze got raised to include tests, CI, and one piece of code that requires actual design thinking. Which is more work, sure, but the reason is to push the project past 'thing the agent generated' and into 'thing the team designed'. The PDF has the calibration anchor (</a:t>
             </a:r>
             <a:r>
               <a:rPr lang="en-US" dirty="0" err="1"/>
@@ -7804,7 +7804,7 @@
             </a:pPr>
             <a:r>
               <a:rPr lang="en-US" dirty="0"/>
-              <a:t>The single biggest framing shift from past final projects: with agents, the CRUD-app-on-cloud part has gotten really cheap. So bronze got raised to include tests, CI, and one piece of code that requires actual design thinking. The point isn't to punish students with extra work, it's to push the project past 'thing the agent generated' into 'thing the team designed'. The PDF has the calibration anchor (</a:t>
+              <a:t>The single biggest framing shift from past final projects: with agents, the CRUD-app-on-cloud part has gotten really cheap. So bronze got raised to include tests, CI, and one piece of code that requires actual design thinking. Which is more work, sure, but the reason is to push the project past 'thing the agent generated' and into 'thing the team designed'. The PDF has the calibration anchor (</a:t>
             </a:r>
             <a:r>
               <a:rPr lang="en-US" dirty="0" err="1"/>
@@ -7970,7 +7970,7 @@
             </a:pPr>
             <a:r>
               <a:rPr lang="en-US" dirty="0"/>
-              <a:t>The new top-line framing: silver is the target, not bronze. Students with agents will be tempted to either over-scope (go for gold on everything, finish nothing) or under-scope (ship bronze, call it done with two weeks left). Both are wrong. The right move is bronze deployed quickly, then iterate up through silver, then pick the most exciting gold moves. The PDF has the exact criteria and a worked example - point students at it rather than reading it.</a:t>
+              <a:t>New top-line framing here, which is that silver is the target. Students with agents get tempted in both directions - go for gold on everything and finish nothing, or ship bronze and call it done with two weeks still on the clock - and neither one ends well. What I want is bronze deployed fast, then iterating up through silver, then picking off whichever gold moves look most fun. The PDF has the exact criteria and a worked example - point students at it rather than reading it.</a:t>
             </a:r>
             <a:endParaRPr dirty="0"/>
           </a:p>

--- a/lectures/Lecture 7.2 - Cloud Deployment.pptx
+++ b/lectures/Lecture 7.2 - Cloud Deployment.pptx
@@ -1013,22 +1013,7 @@
             <a:noAutofit/>
           </a:bodyPr>
           <a:lstStyle/>
-          <a:p>
-            <a:pPr marL="0" lvl="0" indent="0" algn="l" rtl="0">
-              <a:spcBef>
-                <a:spcPts val="0"/>
-              </a:spcBef>
-              <a:spcAft>
-                <a:spcPts val="0"/>
-              </a:spcAft>
-              <a:buNone/>
-            </a:pPr>
-            <a:r>
-              <a:rPr lang="en-US" dirty="0"/>
-              <a:t>Now the conceptual half. Design decisions up front and the mechanics at the end, which is deliberately the reverse of how most deployment tutorials do it.</a:t>
-            </a:r>
-            <a:endParaRPr dirty="0"/>
-          </a:p>
+          <a:p/>
         </p:txBody>
       </p:sp>
       <p:sp>
@@ -1172,28 +1157,9 @@
           </a:bodyPr>
           <a:lstStyle/>
           <a:p>
-            <a:pPr marL="0" lvl="0" indent="0" algn="l" rtl="0">
-              <a:spcBef>
-                <a:spcPts val="0"/>
-              </a:spcBef>
-              <a:spcAft>
-                <a:spcPts val="0"/>
-              </a:spcAft>
-              <a:buNone/>
-            </a:pPr>
-            <a:r>
-              <a:rPr lang="en-US" dirty="0"/>
-              <a:t>Start at the definitional level on purpose. Students have been saying the word 'deploy' all semester without really thinking about what actually changes when you do it. Making those three requirements concrete is </a:t>
-            </a:r>
-            <a:r>
-              <a:rPr lang="en-US" dirty="0" err="1"/>
-              <a:t>kinda</a:t>
-            </a:r>
-            <a:r>
-              <a:rPr lang="en-US" dirty="0"/>
-              <a:t> the grounding for everything in the rest of the lecture - every tool we introduce exists to hit one of those three bullets.</a:t>
-            </a:r>
-            <a:endParaRPr dirty="0"/>
+            <a:r>
+              <a:t>Every tool later maps to one of these three bullets.</a:t>
+            </a:r>
           </a:p>
         </p:txBody>
       </p:sp>
@@ -1337,82 +1303,7 @@
             <a:noAutofit/>
           </a:bodyPr>
           <a:lstStyle/>
-          <a:p>
-            <a:pPr marL="0" lvl="0" indent="0" algn="l" rtl="0">
-              <a:spcBef>
-                <a:spcPts val="0"/>
-              </a:spcBef>
-              <a:spcAft>
-                <a:spcPts val="0"/>
-              </a:spcAft>
-              <a:buNone/>
-            </a:pPr>
-            <a:r>
-              <a:rPr lang="en-US" dirty="0"/>
-              <a:t>Twenty years ago, getting an always-on computer on the internet</a:t>
-            </a:r>
-            <a:endParaRPr dirty="0"/>
-          </a:p>
-          <a:p>
-            <a:pPr marL="0" lvl="0" indent="0" algn="l" rtl="0">
-              <a:spcBef>
-                <a:spcPts val="0"/>
-              </a:spcBef>
-              <a:spcAft>
-                <a:spcPts val="0"/>
-              </a:spcAft>
-              <a:buNone/>
-            </a:pPr>
-            <a:r>
-              <a:rPr lang="en-US" dirty="0"/>
-              <a:t>  meant buying a physical server, racking it in a data center,</a:t>
-            </a:r>
-            <a:endParaRPr dirty="0"/>
-          </a:p>
-          <a:p>
-            <a:pPr marL="0" lvl="0" indent="0" algn="l" rtl="0">
-              <a:spcBef>
-                <a:spcPts val="0"/>
-              </a:spcBef>
-              <a:spcAft>
-                <a:spcPts val="0"/>
-              </a:spcAft>
-              <a:buNone/>
-            </a:pPr>
-            <a:r>
-              <a:rPr lang="en-US" dirty="0"/>
-              <a:t>  paying for power and bandwidth, and hoping nothing burned out.</a:t>
-            </a:r>
-            <a:endParaRPr dirty="0"/>
-          </a:p>
-          <a:p>
-            <a:pPr marL="0" lvl="0" indent="0" algn="l" rtl="0">
-              <a:spcBef>
-                <a:spcPts val="0"/>
-              </a:spcBef>
-              <a:spcAft>
-                <a:spcPts val="0"/>
-              </a:spcAft>
-              <a:buNone/>
-            </a:pPr>
-            <a:endParaRPr dirty="0"/>
-          </a:p>
-          <a:p>
-            <a:pPr marL="0" lvl="0" indent="0" algn="l" rtl="0">
-              <a:spcBef>
-                <a:spcPts val="0"/>
-              </a:spcBef>
-              <a:spcAft>
-                <a:spcPts val="0"/>
-              </a:spcAft>
-              <a:buNone/>
-            </a:pPr>
-            <a:r>
-              <a:rPr lang="en-US" dirty="0"/>
-              <a:t>2006 - Amazon had idle server capacity between holiday shopping spikes. From that, AWS was born.</a:t>
-            </a:r>
-            <a:endParaRPr dirty="0"/>
-          </a:p>
+          <a:p/>
         </p:txBody>
       </p:sp>
       <p:sp>
@@ -1555,22 +1446,7 @@
             <a:noAutofit/>
           </a:bodyPr>
           <a:lstStyle/>
-          <a:p>
-            <a:pPr marL="0" lvl="0" indent="0" algn="l" rtl="0">
-              <a:spcBef>
-                <a:spcPts val="0"/>
-              </a:spcBef>
-              <a:spcAft>
-                <a:spcPts val="0"/>
-              </a:spcAft>
-              <a:buNone/>
-            </a:pPr>
-            <a:r>
-              <a:rPr lang="en-US" dirty="0"/>
-              <a:t>The 'three things' framing is really the foundation for the deployment-tiers slide coming up next. Every cloud product you've ever heard of is basically a different bundling of compute plus storage plus networking at different levels of convenience...which is why asking 'which cloud' is almost always the wrong first question.</a:t>
-            </a:r>
-            <a:endParaRPr dirty="0"/>
-          </a:p>
+          <a:p/>
         </p:txBody>
       </p:sp>
       <p:sp>
@@ -1713,22 +1589,7 @@
             <a:noAutofit/>
           </a:bodyPr>
           <a:lstStyle/>
-          <a:p>
-            <a:pPr marL="0" lvl="0" indent="0" algn="l" rtl="0">
-              <a:spcBef>
-                <a:spcPts val="0"/>
-              </a:spcBef>
-              <a:spcAft>
-                <a:spcPts val="0"/>
-              </a:spcAft>
-              <a:buNone/>
-            </a:pPr>
-            <a:r>
-              <a:rPr lang="en-US" dirty="0"/>
-              <a:t>The ladder. Start at the top whenever you can...only drop down a rung when the higher tier can't give you something you actually need. For a class project, tier 2 is really always the right answer, and the next slide hammers on that explicitly.</a:t>
-            </a:r>
-            <a:endParaRPr dirty="0"/>
-          </a:p>
+          <a:p/>
         </p:txBody>
       </p:sp>
       <p:sp>
@@ -1871,22 +1732,7 @@
             <a:noAutofit/>
           </a:bodyPr>
           <a:lstStyle/>
-          <a:p>
-            <a:pPr marL="0" lvl="0" indent="0" algn="l" rtl="0">
-              <a:spcBef>
-                <a:spcPts val="0"/>
-              </a:spcBef>
-              <a:spcAft>
-                <a:spcPts val="0"/>
-              </a:spcAft>
-              <a:buNone/>
-            </a:pPr>
-            <a:r>
-              <a:rPr lang="en-US" dirty="0"/>
-              <a:t>The ladder. Start at the top whenever you can...only drop down a rung when the higher tier can't give you something you actually need. For a class project, tier 2 is really always the right answer, and the next slide hammers on that explicitly.</a:t>
-            </a:r>
-            <a:endParaRPr dirty="0"/>
-          </a:p>
+          <a:p/>
         </p:txBody>
       </p:sp>
       <p:sp>
@@ -2029,22 +1875,7 @@
             <a:noAutofit/>
           </a:bodyPr>
           <a:lstStyle/>
-          <a:p>
-            <a:pPr marL="0" lvl="0" indent="0" algn="l" rtl="0">
-              <a:spcBef>
-                <a:spcPts val="0"/>
-              </a:spcBef>
-              <a:spcAft>
-                <a:spcPts val="0"/>
-              </a:spcAft>
-              <a:buNone/>
-            </a:pPr>
-            <a:r>
-              <a:rPr lang="en-US" dirty="0"/>
-              <a:t>The ladder. Start at the top whenever you can...only drop down a rung when the higher tier can't give you something you actually need. For a class project, tier 2 is really always the right answer, and the next slide hammers on that explicitly.</a:t>
-            </a:r>
-            <a:endParaRPr dirty="0"/>
-          </a:p>
+          <a:p/>
         </p:txBody>
       </p:sp>
       <p:sp>
@@ -2187,22 +2018,7 @@
             <a:noAutofit/>
           </a:bodyPr>
           <a:lstStyle/>
-          <a:p>
-            <a:pPr marL="0" lvl="0" indent="0" algn="l" rtl="0">
-              <a:spcBef>
-                <a:spcPts val="0"/>
-              </a:spcBef>
-              <a:spcAft>
-                <a:spcPts val="0"/>
-              </a:spcAft>
-              <a:buNone/>
-            </a:pPr>
-            <a:r>
-              <a:rPr lang="en-US" dirty="0"/>
-              <a:t>The ladder. Start at the top whenever you can...only drop down a rung when the higher tier can't give you something you actually need. For a class project, tier 2 is really always the right answer, and the next slide hammers on that explicitly.</a:t>
-            </a:r>
-            <a:endParaRPr dirty="0"/>
-          </a:p>
+          <a:p/>
         </p:txBody>
       </p:sp>
       <p:sp>
@@ -2346,28 +2162,9 @@
           </a:bodyPr>
           <a:lstStyle/>
           <a:p>
-            <a:pPr marL="0" lvl="0" indent="0" algn="l" rtl="0">
-              <a:spcBef>
-                <a:spcPts val="0"/>
-              </a:spcBef>
-              <a:spcAft>
-                <a:spcPts val="0"/>
-              </a:spcAft>
-              <a:buNone/>
-            </a:pPr>
-            <a:r>
-              <a:rPr lang="en-US" dirty="0"/>
-              <a:t>Pure elicitation slide. Have the class shout out everything they'd need to do. Write them on the whiteboard. You want them to land on at least: install Python + Node + Postgres, get a domain name, configure DNS to point to the box, get an SSL/TLS certificate (and renew it), open the firewall on the right port, set up a reverse proxy (nginx) to route traffic, run the app as a daemon (</a:t>
-            </a:r>
-            <a:r>
-              <a:rPr lang="en-US" dirty="0" err="1"/>
-              <a:t>systemd</a:t>
-            </a:r>
-            <a:r>
-              <a:rPr lang="en-US" dirty="0"/>
-              <a:t>) so it restarts on crash, set up logging so you can debug, patch the OS for security, back up the database, monitor for downtime. The list goes on. Once the whiteboard is full, that's the moment to reveal that this entire list is what a PaaS does for you by default. Tee up the next slide.</a:t>
-            </a:r>
-            <a:endParaRPr dirty="0"/>
+            <a:r>
+              <a:t>Whiteboard shout-out. Want: Python/Node/Postgres, domain+DNS, TLS cert, firewall, nginx, systemd, logs, patches, backups, monitoring.</a:t>
+            </a:r>
           </a:p>
         </p:txBody>
       </p:sp>
@@ -2512,36 +2309,9 @@
           </a:bodyPr>
           <a:lstStyle/>
           <a:p>
-            <a:pPr marL="0" lvl="0" indent="0" algn="l" rtl="0">
-              <a:spcBef>
-                <a:spcPts val="0"/>
-              </a:spcBef>
-              <a:spcAft>
-                <a:spcPts val="0"/>
-              </a:spcAft>
-              <a:buNone/>
-            </a:pPr>
-            <a:r>
-              <a:rPr lang="en-US" dirty="0"/>
-              <a:t>Students sometimes feel like using a PaaS is 'not real deployment'...</a:t>
-            </a:r>
-            <a:r>
-              <a:rPr lang="en-US" dirty="0" err="1"/>
-              <a:t>kinda</a:t>
-            </a:r>
-            <a:r>
-              <a:rPr lang="en-US" dirty="0"/>
-              <a:t> like they're supposed to be </a:t>
-            </a:r>
-            <a:r>
-              <a:rPr lang="en-US" dirty="0" err="1"/>
-              <a:t>SSHing</a:t>
-            </a:r>
-            <a:r>
-              <a:rPr lang="en-US" dirty="0"/>
-              <a:t> into a Linux box to do it properly. It really is real deployment, and it's what most small teams and startups are actually running in production. Dispel that out loud.</a:t>
-            </a:r>
-            <a:endParaRPr dirty="0"/>
+            <a:r>
+              <a:t>Say out loud: PaaS is real deployment, most startups run this way.</a:t>
+            </a:r>
           </a:p>
         </p:txBody>
       </p:sp>
@@ -2685,22 +2455,7 @@
             <a:noAutofit/>
           </a:bodyPr>
           <a:lstStyle/>
-          <a:p>
-            <a:pPr marL="0" lvl="0" indent="0" algn="l" rtl="0">
-              <a:spcBef>
-                <a:spcPts val="0"/>
-              </a:spcBef>
-              <a:spcAft>
-                <a:spcPts val="0"/>
-              </a:spcAft>
-              <a:buNone/>
-            </a:pPr>
-            <a:r>
-              <a:rPr lang="en-US" dirty="0"/>
-              <a:t>Logistics section. Treat this half like a syllabus update - tight, informative, no real thesis to defend.</a:t>
-            </a:r>
-            <a:endParaRPr dirty="0"/>
-          </a:p>
+          <a:p/>
         </p:txBody>
       </p:sp>
       <p:sp>
@@ -2843,30 +2598,7 @@
             <a:noAutofit/>
           </a:bodyPr>
           <a:lstStyle/>
-          <a:p>
-            <a:pPr marL="0" lvl="0" indent="0" algn="l" rtl="0">
-              <a:spcBef>
-                <a:spcPts val="0"/>
-              </a:spcBef>
-              <a:spcAft>
-                <a:spcPts val="0"/>
-              </a:spcAft>
-              <a:buNone/>
-            </a:pPr>
-            <a:r>
-              <a:rPr lang="en-US" dirty="0"/>
-              <a:t>Keep this slide concrete - three services, one sentence each. The unified picture really matters more than any individual feature on any one of them. Students will remember 'GitHub, Railway, </a:t>
-            </a:r>
-            <a:r>
-              <a:rPr lang="en-US" dirty="0" err="1"/>
-              <a:t>Supabase</a:t>
-            </a:r>
-            <a:r>
-              <a:rPr lang="en-US" dirty="0"/>
-              <a:t>' as the mental model even if they forget details of what each one does.</a:t>
-            </a:r>
-            <a:endParaRPr dirty="0"/>
-          </a:p>
+          <a:p/>
         </p:txBody>
       </p:sp>
       <p:sp>
@@ -3010,28 +2742,9 @@
           </a:bodyPr>
           <a:lstStyle/>
           <a:p>
-            <a:pPr marL="0" lvl="0" indent="0" algn="l" rtl="0">
-              <a:spcBef>
-                <a:spcPts val="0"/>
-              </a:spcBef>
-              <a:spcAft>
-                <a:spcPts val="0"/>
-              </a:spcAft>
-              <a:buNone/>
-            </a:pPr>
-            <a:r>
-              <a:rPr lang="en-US" dirty="0"/>
-              <a:t>Big reveal slide after the elicitation. The students just generated this list themselves on the whiteboard; now you're naming each item and saying 'Railway does this for you.' The 'clouds all the way down' aside is worth dropping - Railway is itself running on AWS EC2 + GCP, and </a:t>
-            </a:r>
-            <a:r>
-              <a:rPr lang="en-US" dirty="0" err="1"/>
-              <a:t>Supabase</a:t>
-            </a:r>
-            <a:r>
-              <a:rPr lang="en-US" dirty="0"/>
-              <a:t> is running their Postgres instances on AWS too. The whole PaaS industry is a layer of convenience over IaaS. Sign students up for GHSP today if they haven't.</a:t>
-            </a:r>
-            <a:endParaRPr dirty="0"/>
+            <a:r>
+              <a:t>Tick off whiteboard items one by one. Supabase also on AWS. Sign up GHSP today.</a:t>
+            </a:r>
           </a:p>
         </p:txBody>
       </p:sp>
@@ -3176,28 +2889,9 @@
           </a:bodyPr>
           <a:lstStyle/>
           <a:p>
-            <a:pPr marL="0" lvl="0" indent="0" algn="l" rtl="0">
-              <a:spcBef>
-                <a:spcPts val="0"/>
-              </a:spcBef>
-              <a:spcAft>
-                <a:spcPts val="0"/>
-              </a:spcAft>
-              <a:buNone/>
-            </a:pPr>
-            <a:r>
-              <a:rPr lang="en-US" dirty="0"/>
-              <a:t>Big reveal slide after the elicitation. The students just generated this list themselves on the whiteboard; now you're naming each item and saying 'Railway does this for you.' The 'clouds all the way down' aside is worth dropping - Railway is itself running on AWS EC2 + GCP, and </a:t>
-            </a:r>
-            <a:r>
-              <a:rPr lang="en-US" dirty="0" err="1"/>
-              <a:t>Supabase</a:t>
-            </a:r>
-            <a:r>
-              <a:rPr lang="en-US" dirty="0"/>
-              <a:t> is running their Postgres instances on AWS too. The whole PaaS industry is a layer of convenience over IaaS. Sign students up for GHSP today if they haven't.</a:t>
-            </a:r>
-            <a:endParaRPr dirty="0"/>
+            <a:r>
+              <a:t>Tick off whiteboard items one by one. Supabase also on AWS. Sign up GHSP today.</a:t>
+            </a:r>
           </a:p>
         </p:txBody>
       </p:sp>
@@ -3342,52 +3036,9 @@
           </a:bodyPr>
           <a:lstStyle/>
           <a:p>
-            <a:pPr marL="0" lvl="0" indent="0" algn="l" rtl="0">
-              <a:spcBef>
-                <a:spcPts val="0"/>
-              </a:spcBef>
-              <a:spcAft>
-                <a:spcPts val="0"/>
-              </a:spcAft>
-              <a:buNone/>
-            </a:pPr>
-            <a:r>
-              <a:rPr lang="en-US" dirty="0"/>
-              <a:t>Peel-back-the-curtain moment. Most students will assume </a:t>
-            </a:r>
-            <a:r>
-              <a:rPr lang="en-US" dirty="0" err="1"/>
-              <a:t>Supabase</a:t>
-            </a:r>
-            <a:r>
-              <a:rPr lang="en-US" dirty="0"/>
-              <a:t> is one magical thing; showing them it's a stack of specific open-source services demystifies it. Worth asking: 'which two of these will every project use?' Answer: Postgres + </a:t>
-            </a:r>
-            <a:r>
-              <a:rPr lang="en-US" dirty="0" err="1"/>
-              <a:t>GoTrue</a:t>
-            </a:r>
-            <a:r>
-              <a:rPr lang="en-US" dirty="0"/>
-              <a:t> (auth). The fact that the Postgres is JUST Postgres is liberating - if </a:t>
-            </a:r>
-            <a:r>
-              <a:rPr lang="en-US" dirty="0" err="1"/>
-              <a:t>Supabase</a:t>
-            </a:r>
-            <a:r>
-              <a:rPr lang="en-US" dirty="0"/>
-              <a:t> gets weird, you can move to another provider without rewriting your data layer. The </a:t>
-            </a:r>
-            <a:r>
-              <a:rPr lang="en-US" dirty="0" err="1"/>
-              <a:t>realtime</a:t>
-            </a:r>
-            <a:r>
-              <a:rPr lang="en-US" dirty="0"/>
-              <a:t> service is the easy path if a team picks the gold real-time-updates option; mention this.</a:t>
-            </a:r>
-            <a:endParaRPr dirty="0"/>
+            <a:r>
+              <a:t>Ask which two every project uses: Postgres + GoTrue. Realtime is the easy gold path.</a:t>
+            </a:r>
           </a:p>
         </p:txBody>
       </p:sp>
@@ -3532,28 +3183,9 @@
           </a:bodyPr>
           <a:lstStyle/>
           <a:p>
-            <a:pPr marL="0" lvl="0" indent="0" algn="l" rtl="0">
-              <a:spcBef>
-                <a:spcPts val="0"/>
-              </a:spcBef>
-              <a:spcAft>
-                <a:spcPts val="0"/>
-              </a:spcAft>
-              <a:buNone/>
-            </a:pPr>
-            <a:r>
-              <a:rPr lang="en-US" dirty="0"/>
-              <a:t>The JWT flow is THE thing students need to internalize for the project, because every protected endpoint they write is going to use this pattern. Walk through it slowly. The intuition: the JWT is a tamper-proof envelope that says 'this is user X' - tamper-proof because </a:t>
-            </a:r>
-            <a:r>
-              <a:rPr lang="en-US" dirty="0" err="1"/>
-              <a:t>Supabase</a:t>
-            </a:r>
-            <a:r>
-              <a:rPr lang="en-US" dirty="0"/>
-              <a:t> signed it, and you trust the signature because you have the secret. Worth asking: 'why can't the frontend just send the user ID directly in a header?' Answer: because anyone could just send any user ID. The signature is what makes the claim trustworthy. Next slide shows what verification actually looks like in code.</a:t>
-            </a:r>
-            <a:endParaRPr dirty="0"/>
+            <a:r>
+              <a:t>Ask: why not send user ID in a header? Answer: anyone could send any ID.</a:t>
+            </a:r>
           </a:p>
         </p:txBody>
       </p:sp>
@@ -3698,28 +3330,9 @@
           </a:bodyPr>
           <a:lstStyle/>
           <a:p>
-            <a:pPr marL="0" lvl="0" indent="0" algn="l" rtl="0">
-              <a:spcBef>
-                <a:spcPts val="0"/>
-              </a:spcBef>
-              <a:spcAft>
-                <a:spcPts val="0"/>
-              </a:spcAft>
-              <a:buNone/>
-            </a:pPr>
-            <a:r>
-              <a:rPr lang="en-US" dirty="0"/>
-              <a:t>Elicitation slide, same shape as the bare-Linux-box one earlier. Have the class shout out where they'd put the connection string and press them on the failure modes for each option. The bad answers and what's wrong with them: (1) Hardcoded in </a:t>
-            </a:r>
-            <a:r>
-              <a:rPr lang="en-US" dirty="0" err="1"/>
-              <a:t>app.py</a:t>
-            </a:r>
-            <a:r>
-              <a:rPr lang="en-US" dirty="0"/>
-              <a:t> - as soon as you push, the password is on GitHub. If the repo is public it's basically already leaked; even if private, anyone with read access has it forever, and rotating means a history rewrite plus everyone re-cloning. (2) Same problem in any committed config file. (3) A settings file the app reads at startup is closer, but ONLY if that file isn't in the repo - which is essentially the env var pattern in disguise. The point you want them to land on: we need the value to be readable to the code at runtime, but kept out of the repo, AND we need to be able to use a DIFFERENT value on the laptop than on Railway without changing the code. That two-part requirement is what env vars solve. Tee up the next slide once they're stuck. Also worth surfacing the second motivation explicitly - even if a value isn't a secret (say, a dev/prod feature flag), you can't ship code that hardcodes 'localhost' to a server that doesn't have the DB on localhost.</a:t>
-            </a:r>
-            <a:endParaRPr dirty="0"/>
+            <a:r>
+              <a:t>Shout-out, press each option's failure mode. Committed password leaks forever; rotation means history rewrite.</a:t>
+            </a:r>
           </a:p>
         </p:txBody>
       </p:sp>
@@ -3864,28 +3477,9 @@
           </a:bodyPr>
           <a:lstStyle/>
           <a:p>
-            <a:pPr marL="0" lvl="0" indent="0" algn="l" rtl="0">
-              <a:spcBef>
-                <a:spcPts val="0"/>
-              </a:spcBef>
-              <a:spcAft>
-                <a:spcPts val="0"/>
-              </a:spcAft>
-              <a:buNone/>
-            </a:pPr>
-            <a:r>
-              <a:rPr lang="en-US" dirty="0"/>
-              <a:t>Elicitation slide, same shape as the bare-Linux-box one earlier. Have the class shout out where they'd put the connection string and press them on the failure modes for each option. The bad answers and what's wrong with them: (1) Hardcoded in </a:t>
-            </a:r>
-            <a:r>
-              <a:rPr lang="en-US" dirty="0" err="1"/>
-              <a:t>app.py</a:t>
-            </a:r>
-            <a:r>
-              <a:rPr lang="en-US" dirty="0"/>
-              <a:t> - as soon as you push, the password is on GitHub. If the repo is public it's basically already leaked; even if private, anyone with read access has it forever, and rotating means a history rewrite plus everyone re-cloning. (2) Same problem in any committed config file. (3) A settings file the app reads at startup is closer, but ONLY if that file isn't in the repo - which is essentially the env var pattern in disguise. The point you want them to land on: we need the value to be readable to the code at runtime, but kept out of the repo, AND we need to be able to use a DIFFERENT value on the laptop than on Railway without changing the code. That two-part requirement is what env vars solve. Tee up the next slide once they're stuck. Also worth surfacing the second motivation explicitly - even if a value isn't a secret (say, a dev/prod feature flag), you can't ship code that hardcodes 'localhost' to a server that doesn't have the DB on localhost.</a:t>
-            </a:r>
-            <a:endParaRPr dirty="0"/>
+            <a:r>
+              <a:t>Shout-out, press each option's failure mode. Committed password leaks forever; rotation means history rewrite.</a:t>
+            </a:r>
           </a:p>
         </p:txBody>
       </p:sp>
@@ -4030,52 +3624,9 @@
           </a:bodyPr>
           <a:lstStyle/>
           <a:p>
-            <a:pPr marL="0" lvl="0" indent="0" algn="l" rtl="0">
-              <a:spcBef>
-                <a:spcPts val="0"/>
-              </a:spcBef>
-              <a:spcAft>
-                <a:spcPts val="0"/>
-              </a:spcAft>
-              <a:buNone/>
-            </a:pPr>
-            <a:r>
-              <a:rPr lang="en-US" dirty="0"/>
-              <a:t>The whole thing fits in about 20 lines. The key pieces: (1) </a:t>
-            </a:r>
-            <a:r>
-              <a:rPr lang="en-US" dirty="0" err="1"/>
-              <a:t>jwt.decode</a:t>
-            </a:r>
-            <a:r>
-              <a:rPr lang="en-US" dirty="0"/>
-              <a:t> verifies the signature AND raises on expiration - if it returns, the token is valid. (2) the audience='authenticated' bit is </a:t>
-            </a:r>
-            <a:r>
-              <a:rPr lang="en-US" dirty="0" err="1"/>
-              <a:t>Supabase</a:t>
-            </a:r>
-            <a:r>
-              <a:rPr lang="en-US" dirty="0"/>
-              <a:t>-specific; </a:t>
-            </a:r>
-            <a:r>
-              <a:rPr lang="en-US" dirty="0" err="1"/>
-              <a:t>Supabase</a:t>
-            </a:r>
-            <a:r>
-              <a:rPr lang="en-US" dirty="0"/>
-              <a:t> issues tokens with that audience for logged-in users. (3) Depends() in </a:t>
-            </a:r>
-            <a:r>
-              <a:rPr lang="en-US" dirty="0" err="1"/>
-              <a:t>FastAPI</a:t>
-            </a:r>
-            <a:r>
-              <a:rPr lang="en-US" dirty="0"/>
-              <a:t> is how you reuse this on every protected endpoint - one function, applied via Depends, gives you the user ID in any handler. Worth noting: the SUPABASE_JWT_SECRET is the same kind of secret-in-env-var pattern from the slide that follows on env vars.</a:t>
-            </a:r>
-            <a:endParaRPr dirty="0"/>
+            <a:r>
+              <a:t>Blank: `SUPABASE_JWT_SECRET` from env. `jwt.decode` also raises on expiry. `audience='authenticated'` is Supabase-specific.</a:t>
+            </a:r>
           </a:p>
         </p:txBody>
       </p:sp>
@@ -4220,52 +3771,9 @@
           </a:bodyPr>
           <a:lstStyle/>
           <a:p>
-            <a:pPr marL="0" lvl="0" indent="0" algn="l" rtl="0">
-              <a:spcBef>
-                <a:spcPts val="0"/>
-              </a:spcBef>
-              <a:spcAft>
-                <a:spcPts val="0"/>
-              </a:spcAft>
-              <a:buNone/>
-            </a:pPr>
-            <a:r>
-              <a:rPr lang="en-US" dirty="0"/>
-              <a:t>The whole thing fits in about 20 lines. The key pieces: (1) </a:t>
-            </a:r>
-            <a:r>
-              <a:rPr lang="en-US" dirty="0" err="1"/>
-              <a:t>jwt.decode</a:t>
-            </a:r>
-            <a:r>
-              <a:rPr lang="en-US" dirty="0"/>
-              <a:t> verifies the signature AND raises on expiration - if it returns, the token is valid. (2) the audience='authenticated' bit is </a:t>
-            </a:r>
-            <a:r>
-              <a:rPr lang="en-US" dirty="0" err="1"/>
-              <a:t>Supabase</a:t>
-            </a:r>
-            <a:r>
-              <a:rPr lang="en-US" dirty="0"/>
-              <a:t>-specific; </a:t>
-            </a:r>
-            <a:r>
-              <a:rPr lang="en-US" dirty="0" err="1"/>
-              <a:t>Supabase</a:t>
-            </a:r>
-            <a:r>
-              <a:rPr lang="en-US" dirty="0"/>
-              <a:t> issues tokens with that audience for logged-in users. (3) Depends() in </a:t>
-            </a:r>
-            <a:r>
-              <a:rPr lang="en-US" dirty="0" err="1"/>
-              <a:t>FastAPI</a:t>
-            </a:r>
-            <a:r>
-              <a:rPr lang="en-US" dirty="0"/>
-              <a:t> is how you reuse this on every protected endpoint - one function, applied via Depends, gives you the user ID in any handler. Worth noting: the SUPABASE_JWT_SECRET is the same kind of secret-in-env-var pattern from the slide that follows on env vars.</a:t>
-            </a:r>
-            <a:endParaRPr dirty="0"/>
+            <a:r>
+              <a:t>Blank: `SUPABASE_JWT_SECRET` from env. `jwt.decode` also raises on expiry. `audience='authenticated'` is Supabase-specific.</a:t>
+            </a:r>
           </a:p>
         </p:txBody>
       </p:sp>
@@ -4410,52 +3918,9 @@
           </a:bodyPr>
           <a:lstStyle/>
           <a:p>
-            <a:pPr marL="0" lvl="0" indent="0" algn="l" rtl="0">
-              <a:spcBef>
-                <a:spcPts val="0"/>
-              </a:spcBef>
-              <a:spcAft>
-                <a:spcPts val="0"/>
-              </a:spcAft>
-              <a:buNone/>
-            </a:pPr>
-            <a:r>
-              <a:rPr lang="en-US" dirty="0"/>
-              <a:t>The whole thing fits in about 20 lines. The key pieces: (1) </a:t>
-            </a:r>
-            <a:r>
-              <a:rPr lang="en-US" dirty="0" err="1"/>
-              <a:t>jwt.decode</a:t>
-            </a:r>
-            <a:r>
-              <a:rPr lang="en-US" dirty="0"/>
-              <a:t> verifies the signature AND raises on expiration - if it returns, the token is valid. (2) the audience='authenticated' bit is </a:t>
-            </a:r>
-            <a:r>
-              <a:rPr lang="en-US" dirty="0" err="1"/>
-              <a:t>Supabase</a:t>
-            </a:r>
-            <a:r>
-              <a:rPr lang="en-US" dirty="0"/>
-              <a:t>-specific; </a:t>
-            </a:r>
-            <a:r>
-              <a:rPr lang="en-US" dirty="0" err="1"/>
-              <a:t>Supabase</a:t>
-            </a:r>
-            <a:r>
-              <a:rPr lang="en-US" dirty="0"/>
-              <a:t> issues tokens with that audience for logged-in users. (3) Depends() in </a:t>
-            </a:r>
-            <a:r>
-              <a:rPr lang="en-US" dirty="0" err="1"/>
-              <a:t>FastAPI</a:t>
-            </a:r>
-            <a:r>
-              <a:rPr lang="en-US" dirty="0"/>
-              <a:t> is how you reuse this on every protected endpoint - one function, applied via Depends, gives you the user ID in any handler. Worth noting: the SUPABASE_JWT_SECRET is the same kind of secret-in-env-var pattern from the slide that follows on env vars.</a:t>
-            </a:r>
-            <a:endParaRPr dirty="0"/>
+            <a:r>
+              <a:t>Blank: `SUPABASE_JWT_SECRET` from env. `jwt.decode` also raises on expiry. `audience='authenticated'` is Supabase-specific.</a:t>
+            </a:r>
           </a:p>
         </p:txBody>
       </p:sp>
@@ -4600,20 +4065,9 @@
           </a:bodyPr>
           <a:lstStyle/>
           <a:p>
-            <a:pPr marL="0" lvl="0" indent="0" algn="l" rtl="0">
-              <a:spcBef>
-                <a:spcPts val="0"/>
-              </a:spcBef>
-              <a:spcAft>
-                <a:spcPts val="0"/>
-              </a:spcAft>
-              <a:buNone/>
-            </a:pPr>
-            <a:r>
-              <a:rPr lang="en-US" dirty="0"/>
-              <a:t>Pair complementary skills</a:t>
-            </a:r>
-            <a:endParaRPr dirty="0"/>
+            <a:r>
+              <a:t>Suggest pairing complementary skills.</a:t>
+            </a:r>
           </a:p>
         </p:txBody>
       </p:sp>
@@ -4757,22 +4211,7 @@
             <a:noAutofit/>
           </a:bodyPr>
           <a:lstStyle/>
-          <a:p>
-            <a:pPr marL="0" lvl="0" indent="0" algn="l" rtl="0">
-              <a:spcBef>
-                <a:spcPts val="0"/>
-              </a:spcBef>
-              <a:spcAft>
-                <a:spcPts val="0"/>
-              </a:spcAft>
-              <a:buNone/>
-            </a:pPr>
-            <a:r>
-              <a:rPr lang="en-US" dirty="0"/>
-              <a:t>Probably the most important slide in the lecture. Skip it and nothing else in the deployment half makes sense, and CORS really lives or dies right here.</a:t>
-            </a:r>
-            <a:endParaRPr dirty="0"/>
-          </a:p>
+          <a:p/>
         </p:txBody>
       </p:sp>
       <p:sp>
@@ -4916,27 +4355,9 @@
           </a:bodyPr>
           <a:lstStyle/>
           <a:p>
-            <a:pPr marL="0" lvl="0" indent="0" algn="l" rtl="0">
-              <a:spcBef>
-                <a:spcPts val="0"/>
-              </a:spcBef>
-              <a:spcAft>
-                <a:spcPts val="0"/>
-              </a:spcAft>
-              <a:buNone/>
-            </a:pPr>
-            <a:r>
-              <a:rPr lang="en-US" dirty="0"/>
-              <a:t>CORS = Cross-Origin Resource Sharing. This is the slide</a:t>
-            </a:r>
-            <a:br>
-              <a:rPr lang="en-US" dirty="0"/>
-            </a:br>
-            <a:r>
-              <a:rPr lang="en-US" dirty="0"/>
-              <a:t> that really makes deployment tractable for students. The frontend-as-static-files-served-by-the-backend architecture collapses two services into one, and the free lunch is that CORS becomes a total non-issue. Do NOT get into CORS on this slide. The whole point is that you avoided it...if a student asks what CORS is, tell them it's a problem they don't have.</a:t>
-            </a:r>
-            <a:endParaRPr dirty="0"/>
+            <a:r>
+              <a:t>Don't explain CORS here. If asked: a problem they don't have.</a:t>
+            </a:r>
           </a:p>
         </p:txBody>
       </p:sp>
@@ -5081,28 +4502,9 @@
           </a:bodyPr>
           <a:lstStyle/>
           <a:p>
-            <a:pPr marL="0" lvl="0" indent="0" algn="l" rtl="0">
-              <a:spcBef>
-                <a:spcPts val="0"/>
-              </a:spcBef>
-              <a:spcAft>
-                <a:spcPts val="0"/>
-              </a:spcAft>
-              <a:buNone/>
-            </a:pPr>
-            <a:r>
-              <a:rPr lang="en-US" dirty="0"/>
-              <a:t>Routes first, static mount second, or the mount swallows your API paths. And html=True is the bit that makes it hand back index.html for any path that isn't a real file on disk, which is what client-side routing needs to work at all.</a:t>
-            </a:r>
-            <a:r>
-              <a:rPr lang="en-US" dirty="0" err="1"/>
-              <a:t/>
-            </a:r>
-            <a:r>
-              <a:rPr lang="en-US" dirty="0"/>
-              <a:t/>
-            </a:r>
-            <a:endParaRPr dirty="0"/>
+            <a:r>
+              <a:t>Mount swallows `/api` if it comes first. `html=True`: index.html for any non-file path.</a:t>
+            </a:r>
           </a:p>
         </p:txBody>
       </p:sp>
@@ -5247,28 +4649,9 @@
           </a:bodyPr>
           <a:lstStyle/>
           <a:p>
-            <a:pPr marL="0" lvl="0" indent="0" algn="l" rtl="0">
-              <a:spcBef>
-                <a:spcPts val="0"/>
-              </a:spcBef>
-              <a:spcAft>
-                <a:spcPts val="0"/>
-              </a:spcAft>
-              <a:buNone/>
-            </a:pPr>
-            <a:r>
-              <a:rPr lang="en-US" dirty="0"/>
-              <a:t>Routes first, static mount second, or the mount swallows your API paths. And html=True is the bit that makes it hand back index.html for any path that isn't a real file on disk, which is what client-side routing needs to work at all.</a:t>
-            </a:r>
-            <a:r>
-              <a:rPr lang="en-US" dirty="0" err="1"/>
-              <a:t/>
-            </a:r>
-            <a:r>
-              <a:rPr lang="en-US" dirty="0"/>
-              <a:t/>
-            </a:r>
-            <a:endParaRPr dirty="0"/>
+            <a:r>
+              <a:t>Mount swallows `/api` if it comes first. `html=True`: index.html for any non-file path.</a:t>
+            </a:r>
           </a:p>
         </p:txBody>
       </p:sp>
@@ -5413,36 +4796,9 @@
           </a:bodyPr>
           <a:lstStyle/>
           <a:p>
-            <a:pPr marL="0" lvl="0" indent="0" algn="l" rtl="0">
-              <a:spcBef>
-                <a:spcPts val="0"/>
-              </a:spcBef>
-              <a:spcAft>
-                <a:spcPts val="0"/>
-              </a:spcAft>
-              <a:buNone/>
-            </a:pPr>
-            <a:r>
-              <a:rPr lang="en-US" dirty="0"/>
-              <a:t>The build sequence matters because the order is non-obvious. The frontend has to be built BEFORE the server starts, otherwise the </a:t>
-            </a:r>
-            <a:r>
-              <a:rPr lang="en-US" dirty="0" err="1"/>
-              <a:t>dist</a:t>
-            </a:r>
-            <a:r>
-              <a:rPr lang="en-US" dirty="0"/>
-              <a:t>/ folder just doesn't exist yet when </a:t>
-            </a:r>
-            <a:r>
-              <a:rPr lang="en-US" dirty="0" err="1"/>
-              <a:t>FastAPI</a:t>
-            </a:r>
-            <a:r>
-              <a:rPr lang="en-US" dirty="0"/>
-              <a:t> tries to mount it...which is a really confusing failure mode if you haven't seen it before. Walk through it slowly.</a:t>
-            </a:r>
-            <a:endParaRPr dirty="0"/>
+            <a:r>
+              <a:t>Walk through slowly. Build before start, or `frontend/dist` doesn't exist when FastAPI mounts it.</a:t>
+            </a:r>
           </a:p>
         </p:txBody>
       </p:sp>
@@ -5587,28 +4943,9 @@
           </a:bodyPr>
           <a:lstStyle/>
           <a:p>
-            <a:pPr marL="0" lvl="0" indent="0" algn="l" rtl="0">
-              <a:spcBef>
-                <a:spcPts val="0"/>
-              </a:spcBef>
-              <a:spcAft>
-                <a:spcPts val="0"/>
-              </a:spcAft>
-              <a:buNone/>
-            </a:pPr>
-            <a:r>
-              <a:rPr lang="en-US" dirty="0"/>
-              <a:t>The 12-factor-app idea of environment variables is really the foundation of every real deployment you'll ever do. Students will inevitably try to commit .env files on their first attempt - push your coding agent to add .env to .</a:t>
-            </a:r>
-            <a:r>
-              <a:rPr lang="en-US" dirty="0" err="1"/>
-              <a:t>gitignore</a:t>
-            </a:r>
-            <a:r>
-              <a:rPr lang="en-US" dirty="0"/>
-              <a:t> at the start, not the end. Make sure they know it's a GRADED rule, not just a style thing.</a:t>
-            </a:r>
-            <a:endParaRPr dirty="0"/>
+            <a:r>
+              <a:t>Add `.env` to `.gitignore` first thing, not at the end.</a:t>
+            </a:r>
           </a:p>
         </p:txBody>
       </p:sp>
@@ -5753,36 +5090,9 @@
           </a:bodyPr>
           <a:lstStyle/>
           <a:p>
-            <a:pPr marL="0" lvl="0" indent="0" algn="l" rtl="0">
-              <a:spcBef>
-                <a:spcPts val="0"/>
-              </a:spcBef>
-              <a:spcAft>
-                <a:spcPts val="0"/>
-              </a:spcAft>
-              <a:buNone/>
-            </a:pPr>
-            <a:r>
-              <a:rPr lang="en-US" dirty="0"/>
-              <a:t>Walk every piece. .env stays local, and python-dotenv loads it at startup if it's sitting there and quietly does nothing if it isn't...which is really the nice property here, because the same code then works in dev and in prod without a branch anywhere. On Railway the vars get injected directly so there's no .env on the server at all, and .gitignore is what keeps the file from ever hitting the repo.</a:t>
-            </a:r>
-            <a:r>
-              <a:rPr lang="en-US" dirty="0" err="1"/>
-              <a:t/>
-            </a:r>
-            <a:r>
-              <a:rPr lang="en-US" dirty="0"/>
-              <a:t/>
-            </a:r>
-            <a:r>
-              <a:rPr lang="en-US" dirty="0" err="1"/>
-              <a:t/>
-            </a:r>
-            <a:r>
-              <a:rPr lang="en-US" dirty="0"/>
-              <a:t/>
-            </a:r>
-            <a:endParaRPr dirty="0"/>
+            <a:r>
+              <a:t>`load_dotenv` no-ops if no file, so no dev/prod branch. Railway has no `.env` at all.</a:t>
+            </a:r>
           </a:p>
         </p:txBody>
       </p:sp>
@@ -5927,36 +5237,9 @@
           </a:bodyPr>
           <a:lstStyle/>
           <a:p>
-            <a:pPr marL="0" lvl="0" indent="0" algn="l" rtl="0">
-              <a:spcBef>
-                <a:spcPts val="0"/>
-              </a:spcBef>
-              <a:spcAft>
-                <a:spcPts val="0"/>
-              </a:spcAft>
-              <a:buNone/>
-            </a:pPr>
-            <a:r>
-              <a:rPr lang="en-US" dirty="0"/>
-              <a:t>Walk every piece. .env stays local, and python-dotenv loads it at startup if it's sitting there and quietly does nothing if it isn't...which is really the nice property here, because the same code then works in dev and in prod without a branch anywhere. On Railway the vars get injected directly so there's no .env on the server at all, and .gitignore is what keeps the file from ever hitting the repo.</a:t>
-            </a:r>
-            <a:r>
-              <a:rPr lang="en-US" dirty="0" err="1"/>
-              <a:t/>
-            </a:r>
-            <a:r>
-              <a:rPr lang="en-US" dirty="0"/>
-              <a:t/>
-            </a:r>
-            <a:r>
-              <a:rPr lang="en-US" dirty="0" err="1"/>
-              <a:t/>
-            </a:r>
-            <a:r>
-              <a:rPr lang="en-US" dirty="0"/>
-              <a:t/>
-            </a:r>
-            <a:endParaRPr dirty="0"/>
+            <a:r>
+              <a:t>`load_dotenv` no-ops if no file, so no dev/prod branch. Railway has no `.env` at all.</a:t>
+            </a:r>
           </a:p>
         </p:txBody>
       </p:sp>
@@ -6101,36 +5384,9 @@
           </a:bodyPr>
           <a:lstStyle/>
           <a:p>
-            <a:pPr marL="0" lvl="0" indent="0" algn="l" rtl="0">
-              <a:spcBef>
-                <a:spcPts val="0"/>
-              </a:spcBef>
-              <a:spcAft>
-                <a:spcPts val="0"/>
-              </a:spcAft>
-              <a:buNone/>
-            </a:pPr>
-            <a:r>
-              <a:rPr lang="en-US" dirty="0"/>
-              <a:t>Walk every piece. .env stays local, and python-dotenv loads it at startup if it's sitting there and quietly does nothing if it isn't...which is really the nice property here, because the same code then works in dev and in prod without a branch anywhere. On Railway the vars get injected directly so there's no .env on the server at all, and .gitignore is what keeps the file from ever hitting the repo.</a:t>
-            </a:r>
-            <a:r>
-              <a:rPr lang="en-US" dirty="0" err="1"/>
-              <a:t/>
-            </a:r>
-            <a:r>
-              <a:rPr lang="en-US" dirty="0"/>
-              <a:t/>
-            </a:r>
-            <a:r>
-              <a:rPr lang="en-US" dirty="0" err="1"/>
-              <a:t/>
-            </a:r>
-            <a:r>
-              <a:rPr lang="en-US" dirty="0"/>
-              <a:t/>
-            </a:r>
-            <a:endParaRPr dirty="0"/>
+            <a:r>
+              <a:t>`load_dotenv` no-ops if no file, so no dev/prod branch. Railway has no `.env` at all.</a:t>
+            </a:r>
           </a:p>
         </p:txBody>
       </p:sp>
@@ -6275,28 +5531,9 @@
           </a:bodyPr>
           <a:lstStyle/>
           <a:p>
-            <a:pPr marL="0" lvl="0" indent="0" algn="l" rtl="0">
-              <a:spcBef>
-                <a:spcPts val="0"/>
-              </a:spcBef>
-              <a:spcAft>
-                <a:spcPts val="0"/>
-              </a:spcAft>
-              <a:buNone/>
-            </a:pPr>
-            <a:r>
-              <a:rPr lang="en-US" dirty="0"/>
-              <a:t>This is the bridge slide. Students have been running </a:t>
-            </a:r>
-            <a:r>
-              <a:rPr lang="en-US" dirty="0" err="1"/>
-              <a:t>uvicorn</a:t>
-            </a:r>
-            <a:r>
-              <a:rPr lang="en-US" dirty="0"/>
-              <a:t> locally all semester and it's been fine because there's just one environment. The minute they have a second environment (Railway), the question of 'what changes between them and what doesn't' starts to matter. The 12-factor-app idea is the right framework - keep code identical, push environment-specific stuff into env vars. Most of the time they'll do this without thinking; the two places where it gets concrete and confusing are the database (do I need a local Postgres?) and migrations (how does my schema change get to prod?), which is why those each get their own slide.</a:t>
-            </a:r>
-            <a:endParaRPr dirty="0"/>
+            <a:r>
+              <a:t>Name it: 12-factor app.</a:t>
+            </a:r>
           </a:p>
         </p:txBody>
       </p:sp>
@@ -6441,28 +5678,9 @@
           </a:bodyPr>
           <a:lstStyle/>
           <a:p>
-            <a:pPr marL="0" lvl="0" indent="0" algn="l" rtl="0">
-              <a:spcBef>
-                <a:spcPts val="0"/>
-              </a:spcBef>
-              <a:spcAft>
-                <a:spcPts val="0"/>
-              </a:spcAft>
-              <a:buNone/>
-            </a:pPr>
-            <a:r>
-              <a:rPr lang="en-US" dirty="0"/>
-              <a:t>Three week project, three real checkpoints. By 8.1 you've named yourselves and an idea. By 9.1 (halfway) the app exists at a public URL, even if it doesn't do much yet. By 10.2 it's done. The no-extensions rule exists because the deployed-URL nature of the project </a:t>
-            </a:r>
-            <a:r>
-              <a:rPr lang="en-US" dirty="0" err="1"/>
-              <a:t>kinda</a:t>
-            </a:r>
-            <a:r>
-              <a:rPr lang="en-US" dirty="0"/>
-              <a:t> makes extensions nonsensical...if it's not running, it's not running, and there's no partial-credit version of 'live on the internet.' The full milestone breakdown is in the assignment PDF.</a:t>
-            </a:r>
-            <a:endParaRPr dirty="0"/>
+            <a:r>
+              <a:t>No extensions: a not-running URL has no partial credit. Full milestones in the PDF.</a:t>
+            </a:r>
           </a:p>
         </p:txBody>
       </p:sp>
@@ -6607,28 +5825,9 @@
           </a:bodyPr>
           <a:lstStyle/>
           <a:p>
-            <a:pPr marL="0" lvl="0" indent="0" algn="l" rtl="0">
-              <a:spcBef>
-                <a:spcPts val="0"/>
-              </a:spcBef>
-              <a:spcAft>
-                <a:spcPts val="0"/>
-              </a:spcAft>
-              <a:buNone/>
-            </a:pPr>
-            <a:r>
-              <a:rPr lang="en-US" dirty="0"/>
-              <a:t>The actually-important rule is C is forbidden. A and B are both reasonable trade-offs and students will pick based on whether they prefer Docker on their laptop or sub-second responses to localhost. A is closer to 'real' engineering practice; B is closer to 'I don't want to install anything else, ever.' For most teams I'd </a:t>
-            </a:r>
-            <a:r>
-              <a:rPr lang="en-US" dirty="0" err="1"/>
-              <a:t>kinda</a:t>
-            </a:r>
-            <a:r>
-              <a:rPr lang="en-US" dirty="0"/>
-              <a:t> lean B because Docker for Mac is its own little headache for some students. Worth explicitly calling out that some teams will be tempted to use the prod DB for 'just one quick test' and that's how data gets nuked - this happens at real companies too, it's not a student-only failure mode.</a:t>
-            </a:r>
-            <a:endParaRPr dirty="0"/>
+            <a:r>
+              <a:t>Lean B, Docker for Mac is a headache. Real companies wipe prod this way too.</a:t>
+            </a:r>
           </a:p>
         </p:txBody>
       </p:sp>
@@ -6773,52 +5972,9 @@
           </a:bodyPr>
           <a:lstStyle/>
           <a:p>
-            <a:pPr marL="0" lvl="0" indent="0" algn="l" rtl="0">
-              <a:spcBef>
-                <a:spcPts val="0"/>
-              </a:spcBef>
-              <a:spcAft>
-                <a:spcPts val="0"/>
-              </a:spcAft>
-              <a:buNone/>
-            </a:pPr>
-            <a:r>
-              <a:rPr lang="en-US" dirty="0"/>
-              <a:t>Migrations are one of the things teams will hit on the morning of the demo if they don't think about it - they'll add a column locally, push to main, and discover the live app is throwing 500s because the prod table doesn't have that column. Alembic is the 'right' answer for a Python/</a:t>
-            </a:r>
-            <a:r>
-              <a:rPr lang="en-US" dirty="0" err="1"/>
-              <a:t>SQLAlchemy</a:t>
-            </a:r>
-            <a:r>
-              <a:rPr lang="en-US" dirty="0"/>
-              <a:t> stack and worth pointing students at even if they end up just using a </a:t>
-            </a:r>
-            <a:r>
-              <a:rPr lang="en-US" dirty="0" err="1"/>
-              <a:t>schema.sql</a:t>
-            </a:r>
-            <a:r>
-              <a:rPr lang="en-US" dirty="0"/>
-              <a:t> for simplicity. The deeper rule is the one in the last bullet - everything that changes the database lives in the repo, in code review, in CD. The thing to fear is the one teammate who logged into the </a:t>
-            </a:r>
-            <a:r>
-              <a:rPr lang="en-US" dirty="0" err="1"/>
-              <a:t>Supabase</a:t>
-            </a:r>
-            <a:r>
-              <a:rPr lang="en-US" dirty="0"/>
-              <a:t> SQL editor at 11pm before the demo to 'fix something' and now nobody can reproduce the schema. If a team picks the </a:t>
-            </a:r>
-            <a:r>
-              <a:rPr lang="en-US" dirty="0" err="1"/>
-              <a:t>schema.sql</a:t>
-            </a:r>
-            <a:r>
-              <a:rPr lang="en-US" dirty="0"/>
-              <a:t> route, push them toward `IF NOT EXISTS` and additive-only changes so it stays idempotent.</a:t>
-            </a:r>
-            <a:endParaRPr dirty="0"/>
+            <a:r>
+              <a:t>Failure: column added locally, push, prod 500s on demo morning.</a:t>
+            </a:r>
           </a:p>
         </p:txBody>
       </p:sp>
@@ -6963,52 +6119,9 @@
           </a:bodyPr>
           <a:lstStyle/>
           <a:p>
-            <a:pPr marL="0" lvl="0" indent="0" algn="l" rtl="0">
-              <a:spcBef>
-                <a:spcPts val="0"/>
-              </a:spcBef>
-              <a:spcAft>
-                <a:spcPts val="0"/>
-              </a:spcAft>
-              <a:buNone/>
-            </a:pPr>
-            <a:r>
-              <a:rPr lang="en-US" dirty="0"/>
-              <a:t>Migrations are one of the things teams will hit on the morning of the demo if they don't think about it - they'll add a column locally, push to main, and discover the live app is throwing 500s because the prod table doesn't have that column. Alembic is the 'right' answer for a Python/</a:t>
-            </a:r>
-            <a:r>
-              <a:rPr lang="en-US" dirty="0" err="1"/>
-              <a:t>SQLAlchemy</a:t>
-            </a:r>
-            <a:r>
-              <a:rPr lang="en-US" dirty="0"/>
-              <a:t> stack and worth pointing students at even if they end up just using a </a:t>
-            </a:r>
-            <a:r>
-              <a:rPr lang="en-US" dirty="0" err="1"/>
-              <a:t>schema.sql</a:t>
-            </a:r>
-            <a:r>
-              <a:rPr lang="en-US" dirty="0"/>
-              <a:t> for simplicity. The deeper rule is the one in the last bullet - everything that changes the database lives in the repo, in code review, in CD. The thing to fear is the one teammate who logged into the </a:t>
-            </a:r>
-            <a:r>
-              <a:rPr lang="en-US" dirty="0" err="1"/>
-              <a:t>Supabase</a:t>
-            </a:r>
-            <a:r>
-              <a:rPr lang="en-US" dirty="0"/>
-              <a:t> SQL editor at 11pm before the demo to 'fix something' and now nobody can reproduce the schema. If a team picks the </a:t>
-            </a:r>
-            <a:r>
-              <a:rPr lang="en-US" dirty="0" err="1"/>
-              <a:t>schema.sql</a:t>
-            </a:r>
-            <a:r>
-              <a:rPr lang="en-US" dirty="0"/>
-              <a:t> route, push them toward `IF NOT EXISTS` and additive-only changes so it stays idempotent.</a:t>
-            </a:r>
-            <a:endParaRPr dirty="0"/>
+            <a:r>
+              <a:t>schema.sql route: `IF NOT EXISTS`, additive only. Example: teammate hand-edits prod at 11pm.</a:t>
+            </a:r>
           </a:p>
         </p:txBody>
       </p:sp>
@@ -7153,20 +6266,9 @@
           </a:bodyPr>
           <a:lstStyle/>
           <a:p>
-            <a:pPr marL="0" lvl="0" indent="0" algn="l" rtl="0">
-              <a:spcBef>
-                <a:spcPts val="0"/>
-              </a:spcBef>
-              <a:spcAft>
-                <a:spcPts val="0"/>
-              </a:spcAft>
-              <a:buNone/>
-            </a:pPr>
-            <a:r>
-              <a:rPr lang="en-US" dirty="0"/>
-              <a:t>The daily loop is really almost trivially simple once it's set up the first time. The 'read the logs' advice is probably the single most important debugging habit students can pick up this semester. Most deploy problems are super visible in the logs and totally invisible anywhere else...and yet every student's first instinct is to refresh the browser a lot instead of opening the log view. Push them toward the logs.</a:t>
-            </a:r>
-            <a:endParaRPr dirty="0"/>
+            <a:r>
+              <a:t>Expect refresh-the-browser instinct; send them to the log view.</a:t>
+            </a:r>
           </a:p>
         </p:txBody>
       </p:sp>
@@ -7311,20 +6413,9 @@
           </a:bodyPr>
           <a:lstStyle/>
           <a:p>
-            <a:pPr marL="0" lvl="0" indent="0" algn="l" rtl="0">
-              <a:spcBef>
-                <a:spcPts val="0"/>
-              </a:spcBef>
-              <a:spcAft>
-                <a:spcPts val="0"/>
-              </a:spcAft>
-              <a:buNone/>
-            </a:pPr>
-            <a:r>
-              <a:rPr lang="en-US" dirty="0"/>
-              <a:t>The daily loop is really almost trivially simple once it's set up the first time. The 'read the logs' advice is probably the single most important debugging habit students can pick up this semester. Most deploy problems are super visible in the logs and totally invisible anywhere else...and yet every student's first instinct is to refresh the browser a lot instead of opening the log view. Push them toward the logs.</a:t>
-            </a:r>
-            <a:endParaRPr dirty="0"/>
+            <a:r>
+              <a:t>Expect refresh-the-browser instinct; send them to the log view.</a:t>
+            </a:r>
           </a:p>
         </p:txBody>
       </p:sp>
@@ -7469,20 +6560,9 @@
           </a:bodyPr>
           <a:lstStyle/>
           <a:p>
-            <a:pPr marL="0" lvl="0" indent="0" algn="l" rtl="0">
-              <a:spcBef>
-                <a:spcPts val="0"/>
-              </a:spcBef>
-              <a:spcAft>
-                <a:spcPts val="0"/>
-              </a:spcAft>
-              <a:buNone/>
-            </a:pPr>
-            <a:r>
-              <a:rPr lang="en-US" dirty="0"/>
-              <a:t>Double recap because the lecture has two halves that don't obviously connect on first listen. The forward references to Docker (8.1) and CI/CD (8.2) both build directly on today's deployment model. Close on the reminder that teams and ideas need to be locked by 8.1, because otherwise this week is lost.</a:t>
-            </a:r>
-            <a:endParaRPr dirty="0"/>
+            <a:r>
+              <a:t>Docker in 8.1, CI/CD in 8.2. Teams and ideas locked by 8.1.</a:t>
+            </a:r>
           </a:p>
         </p:txBody>
       </p:sp>
@@ -7627,28 +6707,9 @@
           </a:bodyPr>
           <a:lstStyle/>
           <a:p>
-            <a:pPr marL="0" lvl="0" indent="0" algn="l" rtl="0">
-              <a:spcBef>
-                <a:spcPts val="0"/>
-              </a:spcBef>
-              <a:spcAft>
-                <a:spcPts val="0"/>
-              </a:spcAft>
-              <a:buNone/>
-            </a:pPr>
-            <a:r>
-              <a:rPr lang="en-US" dirty="0"/>
-              <a:t>The single biggest framing shift from past final projects: with agents, the CRUD-app-on-cloud part has gotten really cheap. So bronze got raised to include tests, CI, and one piece of code that requires actual design thinking. Which is more work, sure, but the reason is to push the project past 'thing the agent generated' and into 'thing the team designed'. The PDF has the calibration anchor (</a:t>
-            </a:r>
-            <a:r>
-              <a:rPr lang="en-US" dirty="0" err="1"/>
-              <a:t>BookCircle</a:t>
-            </a:r>
-            <a:r>
-              <a:rPr lang="en-US" dirty="0"/>
-              <a:t>) so don't try to reproduce it on slides...point them there.</a:t>
-            </a:r>
-            <a:endParaRPr dirty="0"/>
+            <a:r>
+              <a:t>Point them to the BookCircle example in the PDF, don't walk it here.</a:t>
+            </a:r>
           </a:p>
         </p:txBody>
       </p:sp>
@@ -7793,28 +6854,9 @@
           </a:bodyPr>
           <a:lstStyle/>
           <a:p>
-            <a:pPr marL="0" lvl="0" indent="0" algn="l" rtl="0">
-              <a:spcBef>
-                <a:spcPts val="0"/>
-              </a:spcBef>
-              <a:spcAft>
-                <a:spcPts val="0"/>
-              </a:spcAft>
-              <a:buNone/>
-            </a:pPr>
-            <a:r>
-              <a:rPr lang="en-US" dirty="0"/>
-              <a:t>The single biggest framing shift from past final projects: with agents, the CRUD-app-on-cloud part has gotten really cheap. So bronze got raised to include tests, CI, and one piece of code that requires actual design thinking. Which is more work, sure, but the reason is to push the project past 'thing the agent generated' and into 'thing the team designed'. The PDF has the calibration anchor (</a:t>
-            </a:r>
-            <a:r>
-              <a:rPr lang="en-US" dirty="0" err="1"/>
-              <a:t>BookCircle</a:t>
-            </a:r>
-            <a:r>
-              <a:rPr lang="en-US" dirty="0"/>
-              <a:t>) so don't try to reproduce it on slides...point them there.</a:t>
-            </a:r>
-            <a:endParaRPr dirty="0"/>
+            <a:r>
+              <a:t>Point them to the BookCircle example in the PDF, don't walk it here.</a:t>
+            </a:r>
           </a:p>
         </p:txBody>
       </p:sp>
@@ -7959,20 +7001,9 @@
           </a:bodyPr>
           <a:lstStyle/>
           <a:p>
-            <a:pPr marL="0" lvl="0" indent="0" algn="l" rtl="0">
-              <a:spcBef>
-                <a:spcPts val="0"/>
-              </a:spcBef>
-              <a:spcAft>
-                <a:spcPts val="0"/>
-              </a:spcAft>
-              <a:buNone/>
-            </a:pPr>
-            <a:r>
-              <a:rPr lang="en-US" dirty="0"/>
-              <a:t>New top-line framing here, which is that silver is the target. Students with agents get tempted in both directions - go for gold on everything and finish nothing, or ship bronze and call it done with two weeks still on the clock - and neither one ends well. What I want is bronze deployed fast, then iterating up through silver, then picking off whichever gold moves look most fun. The PDF has the exact criteria and a worked example - point students at it rather than reading it.</a:t>
-            </a:r>
-            <a:endParaRPr dirty="0"/>
+            <a:r>
+              <a:t>Silver is the target. Exact criteria and worked example in the PDF, don't read it.</a:t>
+            </a:r>
           </a:p>
         </p:txBody>
       </p:sp>
@@ -8117,28 +7148,9 @@
           </a:bodyPr>
           <a:lstStyle/>
           <a:p>
-            <a:pPr marL="0" lvl="0" indent="0" algn="l" rtl="0">
-              <a:spcBef>
-                <a:spcPts val="0"/>
-              </a:spcBef>
-              <a:spcAft>
-                <a:spcPts val="0"/>
-              </a:spcAft>
-              <a:buNone/>
-            </a:pPr>
-            <a:r>
-              <a:rPr lang="en-US" dirty="0"/>
-              <a:t>The language layer is fixed because you've all been learning exactly this stack, and switching to Django or Vue in three weeks would just burn the time you need to actually build. Provider choice is flexible because the real lesson here is cloud deployment, not Railway specifically. Most teams will go with Railway + </a:t>
-            </a:r>
-            <a:r>
-              <a:rPr lang="en-US" dirty="0" err="1"/>
-              <a:t>Supabase</a:t>
-            </a:r>
-            <a:r>
-              <a:rPr lang="en-US" dirty="0"/>
-              <a:t> because that's what we walk through, but you don't have to.</a:t>
-            </a:r>
-            <a:endParaRPr dirty="0"/>
+            <a:r>
+              <a:t>Language fixed: no time to learn Django or Vue in three weeks.</a:t>
+            </a:r>
           </a:p>
         </p:txBody>
       </p:sp>
@@ -8283,20 +7295,9 @@
           </a:bodyPr>
           <a:lstStyle/>
           <a:p>
-            <a:pPr marL="0" lvl="0" indent="0" algn="l" rtl="0">
-              <a:spcBef>
-                <a:spcPts val="0"/>
-              </a:spcBef>
-              <a:spcAft>
-                <a:spcPts val="0"/>
-              </a:spcAft>
-              <a:buNone/>
-            </a:pPr>
-            <a:r>
-              <a:rPr lang="en-US" dirty="0"/>
-              <a:t>Deploy early and deploy often. This is the single piece of tactical advice that saves students from the most predictable final-project failure mode - realizing in week 3 that deploying is hard and they have nothing actually live. Get the empty pipeline up first, THEN put real code through it. The assignment formally requires deployment by 9.1 (halfway), but the smart move is much earlier.</a:t>
-            </a:r>
-            <a:endParaRPr dirty="0"/>
+            <a:r>
+              <a:t>Formal deploy deadline is 9.1, push for this week.</a:t>
+            </a:r>
           </a:p>
         </p:txBody>
       </p:sp>
